--- a/docs/講師育成研修_90分_研修資料.pptx
+++ b/docs/講師育成研修_90分_研修資料.pptx
@@ -1077,8 +1077,8 @@
             <a:r>
               <a:rPr lang="en-US" dirty="0"/>
               <a:t>【0:33】ここから12分。
-・実物の資料を必ず手元に用意しておく（スライド・講師台本・受講者配布物）。
-・画面や紙を一緒にめくりながら進める。</a:t>
+・実物の資料を必ず手元に用意しておく（講座資料テキスト・受講者配布物）。
+・一緒にページをめくりながら進める。</a:t>
             </a:r>
             <a:endParaRPr lang="en-US" dirty="0"/>
           </a:p>
@@ -1167,7 +1167,8 @@
             <a:r>
               <a:rPr lang="en-US" dirty="0"/>
               <a:t>【0:34】実物を見せながら。
-・台本のどのページに何が書いてあるかを、指で追って示す。
+・講座資料のどのページに何が書いてあるかを、指で追って示す。
+・別冊の講師台本はない。この資料そのものを読みながら進める形式だと明確に伝える。
 ・『暗記しなくていい』『見ながら話していい』は、はっきり口に出す。ここで安心感が決まる。</a:t>
             </a:r>
             <a:endParaRPr lang="en-US" dirty="0"/>
@@ -1714,7 +1715,7 @@
             <a:r>
               <a:rPr lang="en-US" dirty="0"/>
               <a:t>【0:45-0:55】
-・台本を渡してすぐ始める。考える時間を与えない（それが目的）。
+・テキストを渡してすぐ始める。考える時間を与えない（それが目的）。
 ・終わったら、まず必ず『初見でここまで話せれば十分です』と言う。
 ・指摘は3点まで。多く言わない。優先順位の高いものから1つずつ。
 ・最後に1分リテイク。改善が見えたらその場ではっきり言葉にする。
@@ -10375,7 +10376,7 @@
                 <a:ea typeface="Meiryo" pitchFamily="34" charset="-122"/>
                 <a:cs typeface="Meiryo" pitchFamily="34" charset="-120"/>
               </a:rPr>
-              <a:t>「実技はできるが説明が不安」という理由で ✕ にしないでください。説明は資料と台本でカバーできます。</a:t>
+              <a:t>「実技はできるが説明が不安」という理由で ✕ にしないでください。説明は講座テキストでカバーできます。</a:t>
             </a:r>
             <a:endParaRPr lang="en-US" sz="1050" dirty="0"/>
           </a:p>
@@ -10547,7 +10548,7 @@
                 <a:ea typeface="Meiryo" pitchFamily="34" charset="-122"/>
                 <a:cs typeface="Meiryo" pitchFamily="34" charset="-120"/>
               </a:rPr>
-              <a:t>公式資料の使い方</a:t>
+              <a:t>講座資料の使い方</a:t>
             </a:r>
             <a:endParaRPr lang="en-US" sz="3000" dirty="0"/>
           </a:p>
@@ -10774,7 +10775,7 @@
                 <a:ea typeface="Meiryo" pitchFamily="34" charset="-122"/>
                 <a:cs typeface="Meiryo" pitchFamily="34" charset="-120"/>
               </a:rPr>
-              <a:t>お渡しする資料は3点セットです</a:t>
+              <a:t>お渡しする資料はこの2点です</a:t>
             </a:r>
             <a:endParaRPr lang="en-US" sz="2600" dirty="0"/>
           </a:p>
@@ -10867,7 +10868,7 @@
         <p:spPr>
           <a:xfrm>
             <a:off x="457200" y="1234440"/>
-            <a:ext cx="2679192" cy="2286000"/>
+            <a:ext cx="4023360" cy="2286000"/>
           </a:xfrm>
           <a:prstGeom prst="roundRect">
             <a:avLst>
@@ -10900,7 +10901,7 @@
         </p:nvSpPr>
         <p:spPr>
           <a:xfrm>
-            <a:off x="694944" y="1444752"/>
+            <a:off x="713232" y="1444752"/>
             <a:ext cx="420624" cy="420624"/>
           </a:xfrm>
           <a:prstGeom prst="ellipse">
@@ -10920,7 +10921,7 @@
         </p:nvSpPr>
         <p:spPr>
           <a:xfrm>
-            <a:off x="694944" y="1444752"/>
+            <a:off x="713232" y="1444752"/>
             <a:ext cx="420624" cy="420624"/>
           </a:xfrm>
           <a:prstGeom prst="rect">
@@ -10959,8 +10960,8 @@
         </p:nvSpPr>
         <p:spPr>
           <a:xfrm>
-            <a:off x="1225296" y="1499616"/>
-            <a:ext cx="1737360" cy="292608"/>
+            <a:off x="1243584" y="1499616"/>
+            <a:ext cx="3017520" cy="292608"/>
           </a:xfrm>
           <a:prstGeom prst="rect">
             <a:avLst/>
@@ -10987,7 +10988,7 @@
                 <a:ea typeface="Meiryo" pitchFamily="34" charset="-122"/>
                 <a:cs typeface="Meiryo" pitchFamily="34" charset="-120"/>
               </a:rPr>
-              <a:t>スライド</a:t>
+              <a:t>講座資料（テキスト）</a:t>
             </a:r>
             <a:endParaRPr lang="en-US" sz="1400" dirty="0"/>
           </a:p>
@@ -11001,8 +11002,8 @@
         </p:nvSpPr>
         <p:spPr>
           <a:xfrm>
-            <a:off x="694944" y="2029968"/>
-            <a:ext cx="2240280" cy="256032"/>
+            <a:off x="713232" y="2029968"/>
+            <a:ext cx="3520440" cy="256032"/>
           </a:xfrm>
           <a:prstGeom prst="rect">
             <a:avLst/>
@@ -11029,7 +11030,7 @@
                 <a:ea typeface="Meiryo" pitchFamily="34" charset="-122"/>
                 <a:cs typeface="Meiryo" pitchFamily="34" charset="-120"/>
               </a:rPr>
-              <a:t>研修当日に投影するもの</a:t>
+              <a:t>当日、これを見ながら進めるもの</a:t>
             </a:r>
             <a:endParaRPr lang="en-US" sz="1050" dirty="0"/>
           </a:p>
@@ -11043,8 +11044,8 @@
         </p:nvSpPr>
         <p:spPr>
           <a:xfrm>
-            <a:off x="694944" y="2340864"/>
-            <a:ext cx="2240280" cy="1005840"/>
+            <a:off x="713232" y="2340864"/>
+            <a:ext cx="3520440" cy="1005840"/>
           </a:xfrm>
           <a:prstGeom prst="rect">
             <a:avLst/>
@@ -11063,7 +11064,7 @@
               <a:buNone/>
             </a:pPr>
             <a:r>
-              <a:rPr lang="en-US" sz="1000" dirty="0">
+              <a:rPr lang="en-US" sz="1050" dirty="0">
                 <a:solidFill>
                   <a:srgbClr val="2D3436"/>
                 </a:solidFill>
@@ -11071,9 +11072,9 @@
                 <a:ea typeface="Meiryo" pitchFamily="34" charset="-122"/>
                 <a:cs typeface="Meiryo" pitchFamily="34" charset="-120"/>
               </a:rPr>
-              <a:t>パートごとに分かれており、話す順番はスライドの順番どおりです。アニメーションはありません。</a:t>
-            </a:r>
-            <a:endParaRPr lang="en-US" sz="1000" dirty="0"/>
+              <a:t>話す内容が文章で書かれています。この資料を読みながら進められるように作ってあります。投影しても、手元で読みながら進めても構いません。</a:t>
+            </a:r>
+            <a:endParaRPr lang="en-US" sz="1050" dirty="0"/>
           </a:p>
         </p:txBody>
       </p:sp>
@@ -11085,8 +11086,8 @@
         </p:nvSpPr>
         <p:spPr>
           <a:xfrm>
-            <a:off x="3255264" y="1234440"/>
-            <a:ext cx="2679192" cy="2286000"/>
+            <a:off x="4663440" y="1234440"/>
+            <a:ext cx="4023360" cy="2286000"/>
           </a:xfrm>
           <a:prstGeom prst="roundRect">
             <a:avLst>
@@ -11119,7 +11120,7 @@
         </p:nvSpPr>
         <p:spPr>
           <a:xfrm>
-            <a:off x="3493008" y="1444752"/>
+            <a:off x="4919472" y="1444752"/>
             <a:ext cx="420624" cy="420624"/>
           </a:xfrm>
           <a:prstGeom prst="ellipse">
@@ -11139,7 +11140,7 @@
         </p:nvSpPr>
         <p:spPr>
           <a:xfrm>
-            <a:off x="3493008" y="1444752"/>
+            <a:off x="4919472" y="1444752"/>
             <a:ext cx="420624" cy="420624"/>
           </a:xfrm>
           <a:prstGeom prst="rect">
@@ -11178,8 +11179,8 @@
         </p:nvSpPr>
         <p:spPr>
           <a:xfrm>
-            <a:off x="4023360" y="1499616"/>
-            <a:ext cx="1737360" cy="292608"/>
+            <a:off x="5449824" y="1499616"/>
+            <a:ext cx="3017520" cy="292608"/>
           </a:xfrm>
           <a:prstGeom prst="rect">
             <a:avLst/>
@@ -11206,7 +11207,7 @@
                 <a:ea typeface="Meiryo" pitchFamily="34" charset="-122"/>
                 <a:cs typeface="Meiryo" pitchFamily="34" charset="-120"/>
               </a:rPr>
-              <a:t>講師台本</a:t>
+              <a:t>受講者配布物</a:t>
             </a:r>
             <a:endParaRPr lang="en-US" sz="1400" dirty="0"/>
           </a:p>
@@ -11220,8 +11221,8 @@
         </p:nvSpPr>
         <p:spPr>
           <a:xfrm>
-            <a:off x="3493008" y="2029968"/>
-            <a:ext cx="2240280" cy="256032"/>
+            <a:off x="4919472" y="2029968"/>
+            <a:ext cx="3520440" cy="256032"/>
           </a:xfrm>
           <a:prstGeom prst="rect">
             <a:avLst/>
@@ -11248,7 +11249,7 @@
                 <a:ea typeface="Meiryo" pitchFamily="34" charset="-122"/>
                 <a:cs typeface="Meiryo" pitchFamily="34" charset="-120"/>
               </a:rPr>
-              <a:t>話す内容が書いてあるもの</a:t>
+              <a:t>参加者にお渡しするもの</a:t>
             </a:r>
             <a:endParaRPr lang="en-US" sz="1050" dirty="0"/>
           </a:p>
@@ -11262,8 +11263,8 @@
         </p:nvSpPr>
         <p:spPr>
           <a:xfrm>
-            <a:off x="3493008" y="2340864"/>
-            <a:ext cx="2240280" cy="1005840"/>
+            <a:off x="4919472" y="2340864"/>
+            <a:ext cx="3520440" cy="1005840"/>
           </a:xfrm>
           <a:prstGeom prst="rect">
             <a:avLst/>
@@ -11282,7 +11283,7 @@
               <a:buNone/>
             </a:pPr>
             <a:r>
-              <a:rPr lang="en-US" sz="1000" dirty="0">
+              <a:rPr lang="en-US" sz="1050" dirty="0">
                 <a:solidFill>
                   <a:srgbClr val="2D3436"/>
                 </a:solidFill>
@@ -11290,234 +11291,15 @@
                 <a:ea typeface="Meiryo" pitchFamily="34" charset="-122"/>
                 <a:cs typeface="Meiryo" pitchFamily="34" charset="-120"/>
               </a:rPr>
-              <a:t>スライド1枚につき、話す内容が文章で書いてあります。そのまま読み上げても成立します。</a:t>
-            </a:r>
-            <a:endParaRPr lang="en-US" sz="1000" dirty="0"/>
+              <a:t>習慣化シート、持ち帰り用のセルフケアガイドなど。配るタイミングは講座資料の中に書いてあります。</a:t>
+            </a:r>
+            <a:endParaRPr lang="en-US" sz="1050" dirty="0"/>
           </a:p>
         </p:txBody>
       </p:sp>
       <p:sp>
         <p:nvSpPr>
           <p:cNvPr id="18" name="Shape 16"/>
-          <p:cNvSpPr/>
-          <p:nvPr/>
-        </p:nvSpPr>
-        <p:spPr>
-          <a:xfrm>
-            <a:off x="6053328" y="1234440"/>
-            <a:ext cx="2679192" cy="2286000"/>
-          </a:xfrm>
-          <a:prstGeom prst="roundRect">
-            <a:avLst>
-              <a:gd name="adj" fmla="val 2400"/>
-            </a:avLst>
-          </a:prstGeom>
-          <a:solidFill>
-            <a:srgbClr val="FFFFFF"/>
-          </a:solidFill>
-          <a:ln w="12700">
-            <a:solidFill>
-              <a:srgbClr val="D8E0DB"/>
-            </a:solidFill>
-            <a:prstDash val="solid"/>
-          </a:ln>
-          <a:effectLst>
-            <a:outerShdw sx="100000" sy="100000" kx="0" ky="0" algn="bl" rotWithShape="0" blurRad="76200" dist="12700" dir="5400000">
-              <a:srgbClr val="9AA5A0">
-                <a:alpha val="22000"/>
-              </a:srgbClr>
-            </a:outerShdw>
-          </a:effectLst>
-        </p:spPr>
-      </p:sp>
-      <p:sp>
-        <p:nvSpPr>
-          <p:cNvPr id="19" name="Shape 17"/>
-          <p:cNvSpPr/>
-          <p:nvPr/>
-        </p:nvSpPr>
-        <p:spPr>
-          <a:xfrm>
-            <a:off x="6291072" y="1444752"/>
-            <a:ext cx="420624" cy="420624"/>
-          </a:xfrm>
-          <a:prstGeom prst="ellipse">
-            <a:avLst/>
-          </a:prstGeom>
-          <a:solidFill>
-            <a:srgbClr val="2D6A4F"/>
-          </a:solidFill>
-          <a:ln/>
-        </p:spPr>
-      </p:sp>
-      <p:sp>
-        <p:nvSpPr>
-          <p:cNvPr id="20" name="Text 18"/>
-          <p:cNvSpPr txBox="1"/>
-          <p:nvPr/>
-        </p:nvSpPr>
-        <p:spPr>
-          <a:xfrm>
-            <a:off x="6291072" y="1444752"/>
-            <a:ext cx="420624" cy="420624"/>
-          </a:xfrm>
-          <a:prstGeom prst="rect">
-            <a:avLst/>
-          </a:prstGeom>
-          <a:noFill/>
-          <a:ln/>
-        </p:spPr>
-        <p:txBody>
-          <a:bodyPr wrap="square" lIns="0" tIns="0" rIns="0" bIns="0" rtlCol="0" anchor="ctr"/>
-          <a:lstStyle/>
-          <a:p>
-            <a:pPr algn="ctr" indent="0" marL="0">
-              <a:buNone/>
-            </a:pPr>
-            <a:r>
-              <a:rPr lang="en-US" sz="1400" b="1" dirty="0">
-                <a:solidFill>
-                  <a:srgbClr val="FFFFFF"/>
-                </a:solidFill>
-                <a:latin typeface="Arial" pitchFamily="34" charset="0"/>
-                <a:ea typeface="Arial" pitchFamily="34" charset="-122"/>
-                <a:cs typeface="Arial" pitchFamily="34" charset="-120"/>
-              </a:rPr>
-              <a:t>3</a:t>
-            </a:r>
-            <a:endParaRPr lang="en-US" sz="1400" dirty="0"/>
-          </a:p>
-        </p:txBody>
-      </p:sp>
-      <p:sp>
-        <p:nvSpPr>
-          <p:cNvPr id="21" name="Text 19"/>
-          <p:cNvSpPr txBox="1"/>
-          <p:nvPr/>
-        </p:nvSpPr>
-        <p:spPr>
-          <a:xfrm>
-            <a:off x="6821424" y="1499616"/>
-            <a:ext cx="1737360" cy="292608"/>
-          </a:xfrm>
-          <a:prstGeom prst="rect">
-            <a:avLst/>
-          </a:prstGeom>
-          <a:noFill/>
-          <a:ln/>
-        </p:spPr>
-        <p:txBody>
-          <a:bodyPr wrap="square" lIns="0" tIns="0" rIns="0" bIns="0" rtlCol="0" anchor="t"/>
-          <a:lstStyle/>
-          <a:p>
-            <a:pPr algn="l" indent="0" marL="0">
-              <a:lnSpc>
-                <a:spcPct val="125000"/>
-              </a:lnSpc>
-              <a:buNone/>
-            </a:pPr>
-            <a:r>
-              <a:rPr lang="en-US" sz="1400" b="1" dirty="0">
-                <a:solidFill>
-                  <a:srgbClr val="1B4332"/>
-                </a:solidFill>
-                <a:latin typeface="Meiryo" pitchFamily="34" charset="0"/>
-                <a:ea typeface="Meiryo" pitchFamily="34" charset="-122"/>
-                <a:cs typeface="Meiryo" pitchFamily="34" charset="-120"/>
-              </a:rPr>
-              <a:t>受講者配布物</a:t>
-            </a:r>
-            <a:endParaRPr lang="en-US" sz="1400" dirty="0"/>
-          </a:p>
-        </p:txBody>
-      </p:sp>
-      <p:sp>
-        <p:nvSpPr>
-          <p:cNvPr id="22" name="Text 20"/>
-          <p:cNvSpPr txBox="1"/>
-          <p:nvPr/>
-        </p:nvSpPr>
-        <p:spPr>
-          <a:xfrm>
-            <a:off x="6291072" y="2029968"/>
-            <a:ext cx="2240280" cy="256032"/>
-          </a:xfrm>
-          <a:prstGeom prst="rect">
-            <a:avLst/>
-          </a:prstGeom>
-          <a:noFill/>
-          <a:ln/>
-        </p:spPr>
-        <p:txBody>
-          <a:bodyPr wrap="square" lIns="0" tIns="0" rIns="0" bIns="0" rtlCol="0" anchor="t"/>
-          <a:lstStyle/>
-          <a:p>
-            <a:pPr algn="l" indent="0" marL="0">
-              <a:lnSpc>
-                <a:spcPct val="125000"/>
-              </a:lnSpc>
-              <a:buNone/>
-            </a:pPr>
-            <a:r>
-              <a:rPr lang="en-US" sz="1050" b="1" dirty="0">
-                <a:solidFill>
-                  <a:srgbClr val="2D6A4F"/>
-                </a:solidFill>
-                <a:latin typeface="Meiryo" pitchFamily="34" charset="0"/>
-                <a:ea typeface="Meiryo" pitchFamily="34" charset="-122"/>
-                <a:cs typeface="Meiryo" pitchFamily="34" charset="-120"/>
-              </a:rPr>
-              <a:t>参加者にお渡しするもの</a:t>
-            </a:r>
-            <a:endParaRPr lang="en-US" sz="1050" dirty="0"/>
-          </a:p>
-        </p:txBody>
-      </p:sp>
-      <p:sp>
-        <p:nvSpPr>
-          <p:cNvPr id="23" name="Text 21"/>
-          <p:cNvSpPr txBox="1"/>
-          <p:nvPr/>
-        </p:nvSpPr>
-        <p:spPr>
-          <a:xfrm>
-            <a:off x="6291072" y="2340864"/>
-            <a:ext cx="2240280" cy="1005840"/>
-          </a:xfrm>
-          <a:prstGeom prst="rect">
-            <a:avLst/>
-          </a:prstGeom>
-          <a:noFill/>
-          <a:ln/>
-        </p:spPr>
-        <p:txBody>
-          <a:bodyPr wrap="square" lIns="0" tIns="0" rIns="0" bIns="0" rtlCol="0" anchor="t"/>
-          <a:lstStyle/>
-          <a:p>
-            <a:pPr algn="l" indent="0" marL="0">
-              <a:lnSpc>
-                <a:spcPct val="130000"/>
-              </a:lnSpc>
-              <a:buNone/>
-            </a:pPr>
-            <a:r>
-              <a:rPr lang="en-US" sz="1000" dirty="0">
-                <a:solidFill>
-                  <a:srgbClr val="2D3436"/>
-                </a:solidFill>
-                <a:latin typeface="Meiryo" pitchFamily="34" charset="0"/>
-                <a:ea typeface="Meiryo" pitchFamily="34" charset="-122"/>
-                <a:cs typeface="Meiryo" pitchFamily="34" charset="-120"/>
-              </a:rPr>
-              <a:t>習慣化シート、持ち帰り用のセルフケアガイドなど。配るタイミングは台本に書いてあります。</a:t>
-            </a:r>
-            <a:endParaRPr lang="en-US" sz="1000" dirty="0"/>
-          </a:p>
-        </p:txBody>
-      </p:sp>
-      <p:sp>
-        <p:nvSpPr>
-          <p:cNvPr id="24" name="Shape 22"/>
           <p:cNvSpPr/>
           <p:nvPr/>
         </p:nvSpPr>
@@ -11544,7 +11326,7 @@
       </p:sp>
       <p:sp>
         <p:nvSpPr>
-          <p:cNvPr id="25" name="Text 23"/>
+          <p:cNvPr id="19" name="Text 17"/>
           <p:cNvSpPr txBox="1"/>
           <p:nvPr/>
         </p:nvSpPr>
@@ -11578,7 +11360,7 @@
                 <a:ea typeface="Meiryo" pitchFamily="34" charset="-122"/>
                 <a:cs typeface="Meiryo" pitchFamily="34" charset="-120"/>
               </a:rPr>
-              <a:t>台本は「読み上げてよい」ものです</a:t>
+              <a:t>テキストは「見ながら話してよい」ものです</a:t>
             </a:r>
             <a:endParaRPr lang="en-US" sz="1250" dirty="0"/>
           </a:p>
@@ -11586,7 +11368,7 @@
       </p:sp>
       <p:sp>
         <p:nvSpPr>
-          <p:cNvPr id="26" name="Text 24"/>
+          <p:cNvPr id="20" name="Text 18"/>
           <p:cNvSpPr txBox="1"/>
           <p:nvPr/>
         </p:nvSpPr>
@@ -11620,7 +11402,7 @@
                 <a:ea typeface="Meiryo" pitchFamily="34" charset="-122"/>
                 <a:cs typeface="Meiryo" pitchFamily="34" charset="-120"/>
               </a:rPr>
-              <a:t>暗記する必要はありません。手元に置いて、見ながら話して構いません。慣れてきたら自分の言葉に変えていってください。</a:t>
+              <a:t>暗記する必要はありません。手元に置いて、読みながら進めて構いません。慣れてきたら自分の言葉に変えていってください。</a:t>
             </a:r>
             <a:endParaRPr lang="en-US" sz="1050" dirty="0"/>
           </a:p>
@@ -14628,7 +14410,7 @@
                 <a:ea typeface="Meiryo" pitchFamily="34" charset="-122"/>
                 <a:cs typeface="Meiryo" pitchFamily="34" charset="-120"/>
               </a:rPr>
-              <a:t>この3つさえ守っていただければ、あとは台本どおりで大丈夫です。</a:t>
+              <a:t>この3つさえ守っていただければ、あとは講座テキストのとおりで大丈夫です。</a:t>
             </a:r>
             <a:endParaRPr lang="en-US" sz="1150" dirty="0"/>
           </a:p>
@@ -15156,7 +14938,7 @@
                 <a:ea typeface="Meiryo" pitchFamily="34" charset="-122"/>
                 <a:cs typeface="Meiryo" pitchFamily="34" charset="-120"/>
               </a:rPr>
-              <a:t>スライドと講師台本が用意されています。ゼロから話を組み立てる必要はありません。台本はそのまま読んでも成立するように作っています。</a:t>
+              <a:t>各講座の資料（テキスト）が用意されています。ゼロから話を組み立てる必要はありません。テキストを読みながら進められるように作ってあります。</a:t>
             </a:r>
             <a:endParaRPr lang="en-US" sz="1050" dirty="0"/>
           </a:p>
@@ -15872,7 +15654,7 @@
                 <a:ea typeface="Meiryo" pitchFamily="34" charset="-122"/>
                 <a:cs typeface="Meiryo" pitchFamily="34" charset="-120"/>
               </a:rPr>
-              <a:t>いま渡した台本の1ページを、3分間そのまま読んでみてください。準備時間はありません。</a:t>
+              <a:t>いま渡した講座テキストの1ページを、3分間そのまま読みながら進めてみてください。準備時間はありません。</a:t>
             </a:r>
             <a:endParaRPr lang="en-US" sz="1300" dirty="0"/>
           </a:p>
@@ -15987,7 +15769,7 @@
                 <a:ea typeface="Meiryo" pitchFamily="34" charset="-122"/>
                 <a:cs typeface="Meiryo" pitchFamily="34" charset="-120"/>
               </a:rPr>
-              <a:t>本番でも、台本を見ながら話してよいから</a:t>
+              <a:t>本番でも、テキストを見ながら話してよいから</a:t>
             </a:r>
             <a:endParaRPr lang="en-US" sz="1050" dirty="0"/>
           </a:p>
@@ -16198,7 +15980,7 @@
                 <a:ea typeface="Meiryo" pitchFamily="34" charset="-122"/>
                 <a:cs typeface="Meiryo" pitchFamily="34" charset="-120"/>
               </a:rPr>
-              <a:t>スライドと話が合っているか</a:t>
+              <a:t>いま資料のどこを話しているかが、相手に分かるか</a:t>
             </a:r>
             <a:endParaRPr lang="en-US" sz="1050" dirty="0"/>
           </a:p>
@@ -20883,7 +20665,7 @@
                 <a:ea typeface="Meiryo" pitchFamily="34" charset="-122"/>
                 <a:cs typeface="Meiryo" pitchFamily="34" charset="-120"/>
               </a:rPr>
-              <a:t>持ち物：講師台本／受講者配布物／アンケート用紙／緊急連絡先カード／（測定講座の場合）機器一式</a:t>
+              <a:t>持ち物：講座資料（テキスト）／受講者配布物／アンケート用紙／緊急連絡先カード／（測定講座の場合）機器一式</a:t>
             </a:r>
             <a:endParaRPr lang="en-US" sz="1000" dirty="0"/>
           </a:p>
@@ -23280,7 +23062,7 @@
                 <a:ea typeface="Meiryo" pitchFamily="34" charset="-122"/>
                 <a:cs typeface="Meiryo" pitchFamily="34" charset="-120"/>
               </a:rPr>
-              <a:t>公式資料の使い方</a:t>
+              <a:t>講座資料の使い方</a:t>
             </a:r>
             <a:endParaRPr lang="en-US" sz="1200" dirty="0"/>
           </a:p>
@@ -23322,7 +23104,7 @@
                 <a:ea typeface="Meiryo" pitchFamily="34" charset="-122"/>
                 <a:cs typeface="Meiryo" pitchFamily="34" charset="-120"/>
               </a:rPr>
-              <a:t>スライドと台本の読み方</a:t>
+              <a:t>テキストの読み方・進め方</a:t>
             </a:r>
             <a:endParaRPr lang="en-US" sz="1050" dirty="0"/>
           </a:p>
@@ -24836,7 +24618,7 @@
                 <a:ea typeface="Meiryo" pitchFamily="34" charset="-122"/>
                 <a:cs typeface="Meiryo" pitchFamily="34" charset="-120"/>
               </a:rPr>
-              <a:t>補足資料・台本の読み合わせを追加</a:t>
+              <a:t>補足資料・テキストの読み合わせを追加</a:t>
             </a:r>
             <a:endParaRPr lang="en-US" sz="950" dirty="0"/>
           </a:p>
@@ -25251,7 +25033,7 @@
                 <a:ea typeface="Meiryo" pitchFamily="34" charset="-122"/>
                 <a:cs typeface="Meiryo" pitchFamily="34" charset="-120"/>
               </a:rPr>
-              <a:t>説明パートは、資料と台本のとおりで大丈夫です</a:t>
+              <a:t>説明パートは、講座資料（テキスト）のとおりで大丈夫です</a:t>
             </a:r>
             <a:endParaRPr lang="en-US" sz="1400" dirty="0"/>
           </a:p>
